--- a/sessions_in_Abu_Dhabi/session_10.pptx
+++ b/sessions_in_Abu_Dhabi/session_10.pptx
@@ -29,7 +29,6 @@
     <p:sldId id="277" r:id="rId23"/>
     <p:sldId id="278" r:id="rId24"/>
     <p:sldId id="279" r:id="rId25"/>
-    <p:sldId id="280" r:id="rId26"/>
   </p:sldIdLst>
   <p:sldSz cx="9144000" cy="5143500" type="screen16x9"/>
   <p:notesSz cx="6858000" cy="9144000"/>
@@ -5386,28 +5385,6 @@
           <a:chExt cx="0" cy="0"/>
         </a:xfrm>
       </p:grpSpPr>
-    </p:spTree>
-  </p:cSld>
-</p:sld>
-</file>
-
-<file path=ppt/slides/slide13.xml><?xml version="1.0" encoding="utf-8"?>
-<p:sld xmlns:a="http://schemas.openxmlformats.org/drawingml/2006/main" xmlns:r="http://schemas.openxmlformats.org/officeDocument/2006/relationships" xmlns:p="http://schemas.openxmlformats.org/presentationml/2006/main">
-  <p:cSld>
-    <p:spTree>
-      <p:nvGrpSpPr>
-        <p:cNvPr id="1" name=""/>
-        <p:cNvGrpSpPr/>
-        <p:nvPr/>
-      </p:nvGrpSpPr>
-      <p:grpSpPr>
-        <a:xfrm>
-          <a:off x="0" y="0"/>
-          <a:ext cx="0" cy="0"/>
-          <a:chOff x="0" y="0"/>
-          <a:chExt cx="0" cy="0"/>
-        </a:xfrm>
-      </p:grpSpPr>
       <p:sp>
         <p:nvSpPr>
           <p:cNvPr id="2" name="Title 1"/>
@@ -7307,29 +7284,7 @@
 </p:sld>
 </file>
 
-<file path=ppt/slides/slide14.xml><?xml version="1.0" encoding="utf-8"?>
-<p:sld xmlns:a="http://schemas.openxmlformats.org/drawingml/2006/main" xmlns:r="http://schemas.openxmlformats.org/officeDocument/2006/relationships" xmlns:p="http://schemas.openxmlformats.org/presentationml/2006/main">
-  <p:cSld>
-    <p:spTree>
-      <p:nvGrpSpPr>
-        <p:cNvPr id="1" name=""/>
-        <p:cNvGrpSpPr/>
-        <p:nvPr/>
-      </p:nvGrpSpPr>
-      <p:grpSpPr>
-        <a:xfrm>
-          <a:off x="0" y="0"/>
-          <a:ext cx="0" cy="0"/>
-          <a:chOff x="0" y="0"/>
-          <a:chExt cx="0" cy="0"/>
-        </a:xfrm>
-      </p:grpSpPr>
-    </p:spTree>
-  </p:cSld>
-</p:sld>
-</file>
-
-<file path=ppt/slides/slide15.xml><?xml version="1.0" encoding="utf-8"?>
+<file path=ppt/slides/slide13.xml><?xml version="1.0" encoding="utf-8"?>
 <p:sld xmlns:a="http://schemas.openxmlformats.org/drawingml/2006/main" xmlns:r="http://schemas.openxmlformats.org/officeDocument/2006/relationships" xmlns:p="http://schemas.openxmlformats.org/presentationml/2006/main">
   <p:cSld>
     <p:spTree>
@@ -7597,7 +7552,7 @@
 </p:sld>
 </file>
 
-<file path=ppt/slides/slide16.xml><?xml version="1.0" encoding="utf-8"?>
+<file path=ppt/slides/slide14.xml><?xml version="1.0" encoding="utf-8"?>
 <p:sld xmlns:a="http://schemas.openxmlformats.org/drawingml/2006/main" xmlns:r="http://schemas.openxmlformats.org/officeDocument/2006/relationships" xmlns:p="http://schemas.openxmlformats.org/presentationml/2006/main">
   <p:cSld>
     <p:spTree>
@@ -7757,7 +7712,7 @@
 </p:sld>
 </file>
 
-<file path=ppt/slides/slide17.xml><?xml version="1.0" encoding="utf-8"?>
+<file path=ppt/slides/slide15.xml><?xml version="1.0" encoding="utf-8"?>
 <p:sld xmlns:a="http://schemas.openxmlformats.org/drawingml/2006/main" xmlns:r="http://schemas.openxmlformats.org/officeDocument/2006/relationships" xmlns:p="http://schemas.openxmlformats.org/presentationml/2006/main">
   <p:cSld>
     <p:spTree>
@@ -8236,9 +8191,9 @@
                 <a:tableStyleId>{5C22544A-7EE6-4342-B048-85BDC9FD1C3A}</a:tableStyleId>
               </a:tblPr>
               <a:tblGrid>
-                <a:gridCol w="1701800"/>
-                <a:gridCol w="1701800"/>
-                <a:gridCol w="1701800"/>
+                <a:gridCol w="1231900"/>
+                <a:gridCol w="1930400"/>
+                <a:gridCol w="1930400"/>
               </a:tblGrid>
               <a:tr h="0">
                 <a:tc>
@@ -8310,7 +8265,7 @@
                       </a:pPr>
                       <a:r>
                         <a:rPr/>
-                        <a:t>19002.488</a:t>
+                        <a:t>1900.249</a:t>
                       </a:r>
                     </a:p>
                   </a:txBody>
@@ -8325,7 +8280,7 @@
                       </a:pPr>
                       <a:r>
                         <a:rPr/>
-                        <a:t>17840.381</a:t>
+                        <a:t>1784.038</a:t>
                       </a:r>
                     </a:p>
                   </a:txBody>
@@ -8351,7 +8306,7 @@
                       </a:pPr>
                       <a:r>
                         <a:rPr/>
-                        <a:t>(301.249)</a:t>
+                        <a:t>(30.125)</a:t>
                       </a:r>
                     </a:p>
                   </a:txBody>
@@ -8366,7 +8321,7 @@
                       </a:pPr>
                       <a:r>
                         <a:rPr/>
-                        <a:t>(285.834)</a:t>
+                        <a:t>(28.583)</a:t>
                       </a:r>
                     </a:p>
                   </a:txBody>
@@ -8398,7 +8353,7 @@
                       </a:pPr>
                       <a:r>
                         <a:rPr/>
-                        <a:t>-11162.715</a:t>
+                        <a:t>-1116.272</a:t>
                       </a:r>
                     </a:p>
                   </a:txBody>
@@ -8413,7 +8368,7 @@
                       </a:pPr>
                       <a:r>
                         <a:rPr/>
-                        <a:t>-10000.607</a:t>
+                        <a:t>-1000.061</a:t>
                       </a:r>
                     </a:p>
                   </a:txBody>
@@ -8439,7 +8394,7 @@
                       </a:pPr>
                       <a:r>
                         <a:rPr/>
-                        <a:t>(383.590)</a:t>
+                        <a:t>(38.359)</a:t>
                       </a:r>
                     </a:p>
                   </a:txBody>
@@ -8454,7 +8409,7 @@
                       </a:pPr>
                       <a:r>
                         <a:rPr/>
-                        <a:t>(368.996)</a:t>
+                        <a:t>(36.900)</a:t>
                       </a:r>
                     </a:p>
                   </a:txBody>
@@ -8627,7 +8582,7 @@
                       </a:pPr>
                       <a:r>
                         <a:rPr/>
-                        <a:t>124136.4</a:t>
+                        <a:t>96836.9</a:t>
                       </a:r>
                     </a:p>
                   </a:txBody>
@@ -8642,7 +8597,7 @@
                       </a:pPr>
                       <a:r>
                         <a:rPr/>
-                        <a:t>123417.9</a:t>
+                        <a:t>96118.5</a:t>
                       </a:r>
                     </a:p>
                   </a:txBody>
@@ -8674,7 +8629,7 @@
                       </a:pPr>
                       <a:r>
                         <a:rPr/>
-                        <a:t>124156.4</a:t>
+                        <a:t>96857.0</a:t>
                       </a:r>
                     </a:p>
                   </a:txBody>
@@ -8689,7 +8644,7 @@
                       </a:pPr>
                       <a:r>
                         <a:rPr/>
-                        <a:t>123438.0</a:t>
+                        <a:t>96138.5</a:t>
                       </a:r>
                     </a:p>
                   </a:txBody>
@@ -8721,7 +8676,7 @@
                       </a:pPr>
                       <a:r>
                         <a:rPr/>
-                        <a:t>8526.20</a:t>
+                        <a:t>852.62</a:t>
                       </a:r>
                     </a:p>
                   </a:txBody>
@@ -8736,7 +8691,7 @@
                       </a:pPr>
                       <a:r>
                         <a:rPr/>
-                        <a:t>8024.86</a:t>
+                        <a:t>802.49</a:t>
                       </a:r>
                     </a:p>
                   </a:txBody>
@@ -8828,7 +8783,510 @@
 </p:sld>
 </file>
 
-<file path=ppt/slides/slide18.xml><?xml version="1.0" encoding="utf-8"?>
+<file path=ppt/slides/slide16.xml><?xml version="1.0" encoding="utf-8"?>
+<p:sld xmlns:a="http://schemas.openxmlformats.org/drawingml/2006/main" xmlns:r="http://schemas.openxmlformats.org/officeDocument/2006/relationships" xmlns:p="http://schemas.openxmlformats.org/presentationml/2006/main">
+  <p:cSld>
+    <p:spTree>
+      <p:nvGrpSpPr>
+        <p:cNvPr id="1" name=""/>
+        <p:cNvGrpSpPr/>
+        <p:nvPr/>
+      </p:nvGrpSpPr>
+      <p:grpSpPr>
+        <a:xfrm>
+          <a:off x="0" y="0"/>
+          <a:ext cx="0" cy="0"/>
+          <a:chOff x="0" y="0"/>
+          <a:chExt cx="0" cy="0"/>
+        </a:xfrm>
+      </p:grpSpPr>
+      <p:sp>
+        <p:nvSpPr>
+          <p:cNvPr id="3" name="Content Placeholder 2"/>
+          <p:cNvSpPr>
+            <a:spLocks noGrp="1"/>
+          </p:cNvSpPr>
+          <p:nvPr>
+            <p:ph idx="1"/>
+          </p:nvPr>
+        </p:nvSpPr>
+        <p:spPr/>
+        <p:txBody>
+          <a:bodyPr/>
+          <a:lstStyle/>
+          <a:p>
+            <a:pPr lvl="0" indent="0">
+              <a:buNone/>
+            </a:pPr>
+            <a:r>
+              <a:rPr>
+                <a:solidFill>
+                  <a:srgbClr val="5E5E5E"/>
+                </a:solidFill>
+                <a:latin typeface="Courier"/>
+              </a:rPr>
+              <a:t># # Simplified version</a:t>
+            </a:r>
+            <a:br/>
+            <a:r>
+              <a:rPr>
+                <a:solidFill>
+                  <a:srgbClr val="5E5E5E"/>
+                </a:solidFill>
+                <a:latin typeface="Courier"/>
+              </a:rPr>
+              <a:t># </a:t>
+            </a:r>
+            <a:br/>
+            <a:r>
+              <a:rPr>
+                <a:solidFill>
+                  <a:srgbClr val="5E5E5E"/>
+                </a:solidFill>
+                <a:latin typeface="Courier"/>
+              </a:rPr>
+              <a:t># library(tinytable)</a:t>
+            </a:r>
+            <a:br/>
+            <a:r>
+              <a:rPr>
+                <a:solidFill>
+                  <a:srgbClr val="5E5E5E"/>
+                </a:solidFill>
+                <a:latin typeface="Courier"/>
+              </a:rPr>
+              <a:t># </a:t>
+            </a:r>
+            <a:br/>
+            <a:r>
+              <a:rPr>
+                <a:solidFill>
+                  <a:srgbClr val="5E5E5E"/>
+                </a:solidFill>
+                <a:latin typeface="Courier"/>
+              </a:rPr>
+              <a:t># modelsummary(</a:t>
+            </a:r>
+            <a:br/>
+            <a:r>
+              <a:rPr>
+                <a:solidFill>
+                  <a:srgbClr val="5E5E5E"/>
+                </a:solidFill>
+                <a:latin typeface="Courier"/>
+              </a:rPr>
+              <a:t>#   list("Limited Covs PSM" = out_lm_r, "All Covs PSM"= out_lm_ur),</a:t>
+            </a:r>
+            <a:br/>
+            <a:r>
+              <a:rPr>
+                <a:solidFill>
+                  <a:srgbClr val="5E5E5E"/>
+                </a:solidFill>
+                <a:latin typeface="Courier"/>
+              </a:rPr>
+              <a:t>#   stars = TRUE,</a:t>
+            </a:r>
+            <a:br/>
+            <a:r>
+              <a:rPr>
+                <a:solidFill>
+                  <a:srgbClr val="5E5E5E"/>
+                </a:solidFill>
+                <a:latin typeface="Courier"/>
+              </a:rPr>
+              <a:t>#   gof_map = c("nobs"),</a:t>
+            </a:r>
+            <a:br/>
+            <a:r>
+              <a:rPr>
+                <a:solidFill>
+                  <a:srgbClr val="5E5E5E"/>
+                </a:solidFill>
+                <a:latin typeface="Courier"/>
+              </a:rPr>
+              <a:t>#   title = "Matching Regression Results",</a:t>
+            </a:r>
+            <a:br/>
+            <a:r>
+              <a:rPr>
+                <a:solidFill>
+                  <a:srgbClr val="5E5E5E"/>
+                </a:solidFill>
+                <a:latin typeface="Courier"/>
+              </a:rPr>
+              <a:t>#   coef_map = c(</a:t>
+            </a:r>
+            <a:br/>
+            <a:r>
+              <a:rPr>
+                <a:solidFill>
+                  <a:srgbClr val="5E5E5E"/>
+                </a:solidFill>
+                <a:latin typeface="Courier"/>
+              </a:rPr>
+              <a:t>#     "enrolled" = "Matching Effect",</a:t>
+            </a:r>
+            <a:br/>
+            <a:r>
+              <a:rPr>
+                <a:solidFill>
+                  <a:srgbClr val="5E5E5E"/>
+                </a:solidFill>
+                <a:latin typeface="Courier"/>
+              </a:rPr>
+              <a:t>#     "(Intercept)" = "(Intercept)"</a:t>
+            </a:r>
+            <a:br/>
+            <a:r>
+              <a:rPr>
+                <a:solidFill>
+                  <a:srgbClr val="5E5E5E"/>
+                </a:solidFill>
+                <a:latin typeface="Courier"/>
+              </a:rPr>
+              <a:t>#   ),</a:t>
+            </a:r>
+            <a:br/>
+            <a:r>
+              <a:rPr>
+                <a:solidFill>
+                  <a:srgbClr val="5E5E5E"/>
+                </a:solidFill>
+                <a:latin typeface="Courier"/>
+              </a:rPr>
+              <a:t>#   coef_omit = NULL, </a:t>
+            </a:r>
+            <a:br/>
+            <a:r>
+              <a:rPr>
+                <a:solidFill>
+                  <a:srgbClr val="5E5E5E"/>
+                </a:solidFill>
+                <a:latin typeface="Courier"/>
+              </a:rPr>
+              <a:t>#   notes = "Standard errors are in parenthesis",</a:t>
+            </a:r>
+            <a:br/>
+            <a:r>
+              <a:rPr>
+                <a:solidFill>
+                  <a:srgbClr val="5E5E5E"/>
+                </a:solidFill>
+                <a:latin typeface="Courier"/>
+              </a:rPr>
+              <a:t>#   output = "tinytable"</a:t>
+            </a:r>
+            <a:br/>
+            <a:r>
+              <a:rPr>
+                <a:solidFill>
+                  <a:srgbClr val="5E5E5E"/>
+                </a:solidFill>
+                <a:latin typeface="Courier"/>
+              </a:rPr>
+              <a:t># ) |&gt;</a:t>
+            </a:r>
+            <a:br/>
+            <a:r>
+              <a:rPr>
+                <a:solidFill>
+                  <a:srgbClr val="5E5E5E"/>
+                </a:solidFill>
+                <a:latin typeface="Courier"/>
+              </a:rPr>
+              <a:t>#   style_tt(bootstrap_class = "table caption-top")</a:t>
+            </a:r>
+            <a:br/>
+            <a:br/>
+            <a:r>
+              <a:rPr>
+                <a:solidFill>
+                  <a:srgbClr val="5E5E5E"/>
+                </a:solidFill>
+                <a:latin typeface="Courier"/>
+              </a:rPr>
+              <a:t># ## Output for case study</a:t>
+            </a:r>
+            <a:br/>
+            <a:r>
+              <a:rPr>
+                <a:solidFill>
+                  <a:srgbClr val="5E5E5E"/>
+                </a:solidFill>
+                <a:latin typeface="Courier"/>
+              </a:rPr>
+              <a:t># library(flextable)</a:t>
+            </a:r>
+            <a:br/>
+            <a:r>
+              <a:rPr>
+                <a:solidFill>
+                  <a:srgbClr val="5E5E5E"/>
+                </a:solidFill>
+                <a:latin typeface="Courier"/>
+              </a:rPr>
+              <a:t># library(officer)</a:t>
+            </a:r>
+            <a:br/>
+            <a:r>
+              <a:rPr>
+                <a:solidFill>
+                  <a:srgbClr val="5E5E5E"/>
+                </a:solidFill>
+                <a:latin typeface="Courier"/>
+              </a:rPr>
+              <a:t># </a:t>
+            </a:r>
+            <a:br/>
+            <a:r>
+              <a:rPr>
+                <a:solidFill>
+                  <a:srgbClr val="5E5E5E"/>
+                </a:solidFill>
+                <a:latin typeface="Courier"/>
+              </a:rPr>
+              <a:t># # Build the table as a flextable (editable in Word/PowerPoint)</a:t>
+            </a:r>
+            <a:br/>
+            <a:r>
+              <a:rPr>
+                <a:solidFill>
+                  <a:srgbClr val="5E5E5E"/>
+                </a:solidFill>
+                <a:latin typeface="Courier"/>
+              </a:rPr>
+              <a:t># ft &lt;- modelsummary(</a:t>
+            </a:r>
+            <a:br/>
+            <a:r>
+              <a:rPr>
+                <a:solidFill>
+                  <a:srgbClr val="5E5E5E"/>
+                </a:solidFill>
+                <a:latin typeface="Courier"/>
+              </a:rPr>
+              <a:t>#   list("Limited Covs PSM" = out_lm_r, "All Covs PSM"= out_lm_ur),</a:t>
+            </a:r>
+            <a:br/>
+            <a:r>
+              <a:rPr>
+                <a:solidFill>
+                  <a:srgbClr val="5E5E5E"/>
+                </a:solidFill>
+                <a:latin typeface="Courier"/>
+              </a:rPr>
+              <a:t>#   stars = TRUE,</a:t>
+            </a:r>
+            <a:br/>
+            <a:r>
+              <a:rPr>
+                <a:solidFill>
+                  <a:srgbClr val="5E5E5E"/>
+                </a:solidFill>
+                <a:latin typeface="Courier"/>
+              </a:rPr>
+              <a:t>#   gof_map = c("nobs"),</a:t>
+            </a:r>
+            <a:br/>
+            <a:r>
+              <a:rPr>
+                <a:solidFill>
+                  <a:srgbClr val="5E5E5E"/>
+                </a:solidFill>
+                <a:latin typeface="Courier"/>
+              </a:rPr>
+              <a:t>#   title = "Matching Regression Results",</a:t>
+            </a:r>
+            <a:br/>
+            <a:r>
+              <a:rPr>
+                <a:solidFill>
+                  <a:srgbClr val="5E5E5E"/>
+                </a:solidFill>
+                <a:latin typeface="Courier"/>
+              </a:rPr>
+              <a:t>#   coef_map = c(</a:t>
+            </a:r>
+            <a:br/>
+            <a:r>
+              <a:rPr>
+                <a:solidFill>
+                  <a:srgbClr val="5E5E5E"/>
+                </a:solidFill>
+                <a:latin typeface="Courier"/>
+              </a:rPr>
+              <a:t>#     "enrolled" = "Matching Effect",</a:t>
+            </a:r>
+            <a:br/>
+            <a:r>
+              <a:rPr>
+                <a:solidFill>
+                  <a:srgbClr val="5E5E5E"/>
+                </a:solidFill>
+                <a:latin typeface="Courier"/>
+              </a:rPr>
+              <a:t>#     "(Intercept)" = "(Intercept)"</a:t>
+            </a:r>
+            <a:br/>
+            <a:r>
+              <a:rPr>
+                <a:solidFill>
+                  <a:srgbClr val="5E5E5E"/>
+                </a:solidFill>
+                <a:latin typeface="Courier"/>
+              </a:rPr>
+              <a:t>#   ),</a:t>
+            </a:r>
+            <a:br/>
+            <a:r>
+              <a:rPr>
+                <a:solidFill>
+                  <a:srgbClr val="5E5E5E"/>
+                </a:solidFill>
+                <a:latin typeface="Courier"/>
+              </a:rPr>
+              <a:t>#   notes = "Standard errors are in parentheses",</a:t>
+            </a:r>
+            <a:br/>
+            <a:r>
+              <a:rPr>
+                <a:solidFill>
+                  <a:srgbClr val="5E5E5E"/>
+                </a:solidFill>
+                <a:latin typeface="Courier"/>
+              </a:rPr>
+              <a:t>#   fmt = 2,</a:t>
+            </a:r>
+            <a:br/>
+            <a:r>
+              <a:rPr>
+                <a:solidFill>
+                  <a:srgbClr val="5E5E5E"/>
+                </a:solidFill>
+                <a:latin typeface="Courier"/>
+              </a:rPr>
+              <a:t>#   output = "flextable"</a:t>
+            </a:r>
+            <a:br/>
+            <a:r>
+              <a:rPr>
+                <a:solidFill>
+                  <a:srgbClr val="5E5E5E"/>
+                </a:solidFill>
+                <a:latin typeface="Courier"/>
+              </a:rPr>
+              <a:t># )</a:t>
+            </a:r>
+            <a:br/>
+            <a:r>
+              <a:rPr>
+                <a:solidFill>
+                  <a:srgbClr val="5E5E5E"/>
+                </a:solidFill>
+                <a:latin typeface="Courier"/>
+              </a:rPr>
+              <a:t># </a:t>
+            </a:r>
+            <a:br/>
+            <a:r>
+              <a:rPr>
+                <a:solidFill>
+                  <a:srgbClr val="5E5E5E"/>
+                </a:solidFill>
+                <a:latin typeface="Courier"/>
+              </a:rPr>
+              <a:t># # let flextable size to content, then stretch to a target width</a:t>
+            </a:r>
+            <a:br/>
+            <a:r>
+              <a:rPr>
+                <a:solidFill>
+                  <a:srgbClr val="5E5E5E"/>
+                </a:solidFill>
+                <a:latin typeface="Courier"/>
+              </a:rPr>
+              <a:t># ft &lt;- autofit(ft)</a:t>
+            </a:r>
+            <a:br/>
+            <a:r>
+              <a:rPr>
+                <a:solidFill>
+                  <a:srgbClr val="5E5E5E"/>
+                </a:solidFill>
+                <a:latin typeface="Courier"/>
+              </a:rPr>
+              <a:t># ft &lt;- fit_to_width(ft, max_width = 9)  # inches; ~content area on a PPT slide</a:t>
+            </a:r>
+            <a:br/>
+            <a:r>
+              <a:rPr>
+                <a:solidFill>
+                  <a:srgbClr val="5E5E5E"/>
+                </a:solidFill>
+                <a:latin typeface="Courier"/>
+              </a:rPr>
+              <a:t># ft &lt;- width(ft, j = 1, width = 2.5)    # widen the left/stub column (adjust as needed)</a:t>
+            </a:r>
+            <a:br/>
+            <a:r>
+              <a:rPr>
+                <a:solidFill>
+                  <a:srgbClr val="5E5E5E"/>
+                </a:solidFill>
+                <a:latin typeface="Courier"/>
+              </a:rPr>
+              <a:t># </a:t>
+            </a:r>
+            <a:br/>
+            <a:r>
+              <a:rPr>
+                <a:solidFill>
+                  <a:srgbClr val="5E5E5E"/>
+                </a:solidFill>
+                <a:latin typeface="Courier"/>
+              </a:rPr>
+              <a:t># ## 1) Save to Word (.docx)</a:t>
+            </a:r>
+            <a:br/>
+            <a:r>
+              <a:rPr>
+                <a:solidFill>
+                  <a:srgbClr val="5E5E5E"/>
+                </a:solidFill>
+                <a:latin typeface="Courier"/>
+              </a:rPr>
+              <a:t># doc &lt;- read_docx()</a:t>
+            </a:r>
+            <a:br/>
+            <a:r>
+              <a:rPr>
+                <a:solidFill>
+                  <a:srgbClr val="5E5E5E"/>
+                </a:solidFill>
+                <a:latin typeface="Courier"/>
+              </a:rPr>
+              <a:t># doc &lt;- body_add_flextable(doc, ft)</a:t>
+            </a:r>
+            <a:br/>
+            <a:r>
+              <a:rPr>
+                <a:solidFill>
+                  <a:srgbClr val="5E5E5E"/>
+                </a:solidFill>
+                <a:latin typeface="Courier"/>
+              </a:rPr>
+              <a:t># print(doc, target = "C:/Users/FionaKastel/OneDrive - 3ie/Documents/GitHub/R-course/sessions_in_Abu_Dhabi/case_study_outputs/session10_PSM.docx")</a:t>
+            </a:r>
+          </a:p>
+        </p:txBody>
+      </p:sp>
+    </p:spTree>
+  </p:cSld>
+</p:sld>
+</file>
+
+<file path=ppt/slides/slide17.xml><?xml version="1.0" encoding="utf-8"?>
 <p:sld xmlns:a="http://schemas.openxmlformats.org/drawingml/2006/main" xmlns:r="http://schemas.openxmlformats.org/officeDocument/2006/relationships" xmlns:p="http://schemas.openxmlformats.org/presentationml/2006/main">
   <p:cSld>
     <p:spTree>
@@ -9227,7 +9685,7 @@
 </p:sld>
 </file>
 
-<file path=ppt/slides/slide19.xml><?xml version="1.0" encoding="utf-8"?>
+<file path=ppt/slides/slide18.xml><?xml version="1.0" encoding="utf-8"?>
 <p:sld xmlns:a="http://schemas.openxmlformats.org/drawingml/2006/main" xmlns:r="http://schemas.openxmlformats.org/officeDocument/2006/relationships" xmlns:p="http://schemas.openxmlformats.org/presentationml/2006/main">
   <p:cSld>
     <p:spTree>
@@ -9916,9 +10374,9 @@
                 <a:tableStyleId>{5C22544A-7EE6-4342-B048-85BDC9FD1C3A}</a:tableStyleId>
               </a:tblPr>
               <a:tblGrid>
-                <a:gridCol w="1701800"/>
-                <a:gridCol w="1701800"/>
-                <a:gridCol w="1701800"/>
+                <a:gridCol w="1651000"/>
+                <a:gridCol w="1727200"/>
+                <a:gridCol w="1727200"/>
               </a:tblGrid>
               <a:tr h="0">
                 <a:tc>
@@ -9990,7 +10448,7 @@
                       </a:pPr>
                       <a:r>
                         <a:rPr/>
-                        <a:t>-1441.854</a:t>
+                        <a:t>-144.185</a:t>
                       </a:r>
                     </a:p>
                   </a:txBody>
@@ -10005,7 +10463,7 @@
                       </a:pPr>
                       <a:r>
                         <a:rPr/>
-                        <a:t>-544.742</a:t>
+                        <a:t>-54.474</a:t>
                       </a:r>
                     </a:p>
                   </a:txBody>
@@ -10031,7 +10489,7 @@
                       </a:pPr>
                       <a:r>
                         <a:rPr/>
-                        <a:t>(264.445)</a:t>
+                        <a:t>(26.444)</a:t>
                       </a:r>
                     </a:p>
                   </a:txBody>
@@ -10046,7 +10504,7 @@
                       </a:pPr>
                       <a:r>
                         <a:rPr/>
-                        <a:t>(237.034)</a:t>
+                        <a:t>(23.703)</a:t>
                       </a:r>
                     </a:p>
                   </a:txBody>
@@ -10078,7 +10536,7 @@
                       </a:pPr>
                       <a:r>
                         <a:rPr/>
-                        <a:t>3070.940</a:t>
+                        <a:t>307.094</a:t>
                       </a:r>
                     </a:p>
                   </a:txBody>
@@ -10093,7 +10551,7 @@
                       </a:pPr>
                       <a:r>
                         <a:rPr/>
-                        <a:t>2805.945</a:t>
+                        <a:t>280.594</a:t>
                       </a:r>
                     </a:p>
                   </a:txBody>
@@ -10119,7 +10577,7 @@
                       </a:pPr>
                       <a:r>
                         <a:rPr/>
-                        <a:t>(235.805)</a:t>
+                        <a:t>(23.581)</a:t>
                       </a:r>
                     </a:p>
                   </a:txBody>
@@ -10134,7 +10592,7 @@
                       </a:pPr>
                       <a:r>
                         <a:rPr/>
-                        <a:t>(226.712)</a:t>
+                        <a:t>(22.671)</a:t>
                       </a:r>
                     </a:p>
                   </a:txBody>
@@ -10166,7 +10624,7 @@
                       </a:pPr>
                       <a:r>
                         <a:rPr/>
-                        <a:t>-9720.861</a:t>
+                        <a:t>-972.086</a:t>
                       </a:r>
                     </a:p>
                   </a:txBody>
@@ -10181,7 +10639,7 @@
                       </a:pPr>
                       <a:r>
                         <a:rPr/>
-                        <a:t>-9455.866</a:t>
+                        <a:t>-945.587</a:t>
                       </a:r>
                     </a:p>
                   </a:txBody>
@@ -10207,7 +10665,7 @@
                       </a:pPr>
                       <a:r>
                         <a:rPr/>
-                        <a:t>(301.548)</a:t>
+                        <a:t>(30.155)</a:t>
                       </a:r>
                     </a:p>
                   </a:txBody>
@@ -10222,7 +10680,7 @@
                       </a:pPr>
                       <a:r>
                         <a:rPr/>
-                        <a:t>(297.682)</a:t>
+                        <a:t>(29.768)</a:t>
                       </a:r>
                     </a:p>
                   </a:txBody>
@@ -10395,7 +10853,7 @@
                       </a:pPr>
                       <a:r>
                         <a:rPr/>
-                        <a:t>243181.9</a:t>
+                        <a:t>188583.0</a:t>
                       </a:r>
                     </a:p>
                   </a:txBody>
@@ -10410,7 +10868,7 @@
                       </a:pPr>
                       <a:r>
                         <a:rPr/>
-                        <a:t>241958.7</a:t>
+                        <a:t>187359.8</a:t>
                       </a:r>
                     </a:p>
                   </a:txBody>
@@ -10442,7 +10900,7 @@
                       </a:pPr>
                       <a:r>
                         <a:rPr/>
-                        <a:t>243218.8</a:t>
+                        <a:t>188619.9</a:t>
                       </a:r>
                     </a:p>
                   </a:txBody>
@@ -10457,7 +10915,7 @@
                       </a:pPr>
                       <a:r>
                         <a:rPr/>
-                        <a:t>241995.6</a:t>
+                        <a:t>187396.7</a:t>
                       </a:r>
                     </a:p>
                   </a:txBody>
@@ -10489,7 +10947,7 @@
                       </a:pPr>
                       <a:r>
                         <a:rPr/>
-                        <a:t>6879.39</a:t>
+                        <a:t>687.94</a:t>
                       </a:r>
                     </a:p>
                   </a:txBody>
@@ -10504,7 +10962,7 @@
                       </a:pPr>
                       <a:r>
                         <a:rPr/>
-                        <a:t>6533.53</a:t>
+                        <a:t>653.35</a:t>
                       </a:r>
                     </a:p>
                   </a:txBody>
@@ -10593,6 +11051,300 @@
       </p:sp>
     </p:spTree>
   </p:cSld>
+</p:sld>
+</file>
+
+<file path=ppt/slides/slide19.xml><?xml version="1.0" encoding="utf-8"?>
+<p:sld xmlns:a="http://schemas.openxmlformats.org/drawingml/2006/main" xmlns:r="http://schemas.openxmlformats.org/officeDocument/2006/relationships" xmlns:p="http://schemas.openxmlformats.org/presentationml/2006/main">
+  <p:cSld>
+    <p:spTree>
+      <p:nvGrpSpPr>
+        <p:cNvPr id="1" name=""/>
+        <p:cNvGrpSpPr/>
+        <p:nvPr/>
+      </p:nvGrpSpPr>
+      <p:grpSpPr>
+        <a:xfrm>
+          <a:off x="0" y="0"/>
+          <a:ext cx="0" cy="0"/>
+          <a:chOff x="0" y="0"/>
+          <a:chExt cx="0" cy="0"/>
+        </a:xfrm>
+      </p:grpSpPr>
+      <p:sp>
+        <p:nvSpPr>
+          <p:cNvPr id="2" name="Title 1"/>
+          <p:cNvSpPr>
+            <a:spLocks noGrp="1"/>
+          </p:cNvSpPr>
+          <p:nvPr>
+            <p:ph type="title"/>
+          </p:nvPr>
+        </p:nvSpPr>
+        <p:spPr/>
+        <p:txBody>
+          <a:bodyPr/>
+          <a:lstStyle/>
+          <a:p>
+            <a:pPr lvl="0" indent="0" marL="0">
+              <a:buNone/>
+            </a:pPr>
+            <a:r>
+              <a:rPr/>
+              <a:t>Interpretation of Results</a:t>
+            </a:r>
+          </a:p>
+        </p:txBody>
+      </p:sp>
+      <p:sp>
+        <p:nvSpPr>
+          <p:cNvPr id="3" name="Content Placeholder 2"/>
+          <p:cNvSpPr>
+            <a:spLocks noGrp="1"/>
+          </p:cNvSpPr>
+          <p:nvPr>
+            <p:ph idx="1"/>
+          </p:nvPr>
+        </p:nvSpPr>
+        <p:spPr/>
+        <p:txBody>
+          <a:bodyPr/>
+          <a:lstStyle/>
+          <a:p>
+            <a:pPr lvl="0"/>
+            <a:r>
+              <a:rPr b="1"/>
+              <a:t>Enrolled</a:t>
+            </a:r>
+            <a:r>
+              <a:rPr/>
+              <a:t> coefficient: Baseline difference between groups</a:t>
+            </a:r>
+          </a:p>
+          <a:p>
+            <a:pPr lvl="0"/>
+            <a:r>
+              <a:rPr b="1"/>
+              <a:t>Round</a:t>
+            </a:r>
+            <a:r>
+              <a:rPr/>
+              <a:t> coefficient: Time trend for all facilities</a:t>
+            </a:r>
+          </a:p>
+          <a:p>
+            <a:pPr lvl="0"/>
+            <a:r>
+              <a:rPr b="1"/>
+              <a:t>Enrollment × Round</a:t>
+            </a:r>
+            <a:r>
+              <a:rPr/>
+              <a:t>: The program’s causal effect</a:t>
+            </a:r>
+          </a:p>
+          <a:p>
+            <a:pPr lvl="0" indent="0" marL="1270000">
+              <a:buNone/>
+            </a:pPr>
+            <a:r>
+              <a:rPr sz="2000" b="1"/>
+              <a:t>Note</a:t>
+            </a:r>
+          </a:p>
+          <a:p>
+            <a:pPr lvl="0" indent="0" marL="1270000">
+              <a:buNone/>
+            </a:pPr>
+            <a:r>
+              <a:rPr sz="2000"/>
+              <a:t>The interaction coefficient (Enrollment × Round) represents our estimate of the causal impact of the program on waste management costs.</a:t>
+            </a:r>
+          </a:p>
+        </p:txBody>
+      </p:sp>
+    </p:spTree>
+  </p:cSld>
+  <p:timing>
+    <p:tnLst>
+      <p:par>
+        <p:cTn id="1" dur="indefinite" restart="never" nodeType="tmRoot">
+          <p:childTnLst>
+            <p:seq concurrent="1" nextAc="seek">
+              <p:cTn id="2" dur="indefinite" nodeType="mainSeq">
+                <p:childTnLst>
+                  <p:par>
+                    <p:cTn id="3" fill="hold">
+                      <p:stCondLst>
+                        <p:cond delay="indefinite"/>
+                      </p:stCondLst>
+                      <p:childTnLst>
+                        <p:par>
+                          <p:cTn id="4" fill="hold">
+                            <p:stCondLst>
+                              <p:cond delay="0"/>
+                            </p:stCondLst>
+                            <p:childTnLst>
+                              <p:par>
+                                <p:cTn id="5" presetID="1" presetClass="entr" presetSubtype="0" fill="hold" grpId="0" nodeType="clickEffect">
+                                  <p:stCondLst>
+                                    <p:cond delay="0"/>
+                                  </p:stCondLst>
+                                  <p:childTnLst>
+                                    <p:set>
+                                      <p:cBhvr>
+                                        <p:cTn id="6" dur="1" fill="hold">
+                                          <p:stCondLst>
+                                            <p:cond delay="0"/>
+                                          </p:stCondLst>
+                                        </p:cTn>
+                                        <p:tgtEl>
+                                          <p:spTgt spid="3">
+                                            <p:txEl>
+                                              <p:pRg st="0" end="0"/>
+                                            </p:txEl>
+                                          </p:spTgt>
+                                        </p:tgtEl>
+                                        <p:attrNameLst>
+                                          <p:attrName>style.visibility</p:attrName>
+                                        </p:attrNameLst>
+                                      </p:cBhvr>
+                                      <p:to>
+                                        <p:strVal val="visible"/>
+                                      </p:to>
+                                    </p:set>
+                                  </p:childTnLst>
+                                </p:cTn>
+                              </p:par>
+                            </p:childTnLst>
+                          </p:cTn>
+                        </p:par>
+                      </p:childTnLst>
+                    </p:cTn>
+                  </p:par>
+                  <p:par>
+                    <p:cTn id="7" fill="hold">
+                      <p:stCondLst>
+                        <p:cond delay="indefinite"/>
+                      </p:stCondLst>
+                      <p:childTnLst>
+                        <p:par>
+                          <p:cTn id="8" fill="hold">
+                            <p:stCondLst>
+                              <p:cond delay="0"/>
+                            </p:stCondLst>
+                            <p:childTnLst>
+                              <p:par>
+                                <p:cTn id="9" presetID="1" presetClass="entr" presetSubtype="0" fill="hold" grpId="0" nodeType="clickEffect">
+                                  <p:stCondLst>
+                                    <p:cond delay="0"/>
+                                  </p:stCondLst>
+                                  <p:childTnLst>
+                                    <p:set>
+                                      <p:cBhvr>
+                                        <p:cTn id="10" dur="1" fill="hold">
+                                          <p:stCondLst>
+                                            <p:cond delay="0"/>
+                                          </p:stCondLst>
+                                        </p:cTn>
+                                        <p:tgtEl>
+                                          <p:spTgt spid="3">
+                                            <p:txEl>
+                                              <p:pRg st="1" end="1"/>
+                                            </p:txEl>
+                                          </p:spTgt>
+                                        </p:tgtEl>
+                                        <p:attrNameLst>
+                                          <p:attrName>style.visibility</p:attrName>
+                                        </p:attrNameLst>
+                                      </p:cBhvr>
+                                      <p:to>
+                                        <p:strVal val="visible"/>
+                                      </p:to>
+                                    </p:set>
+                                  </p:childTnLst>
+                                </p:cTn>
+                              </p:par>
+                            </p:childTnLst>
+                          </p:cTn>
+                        </p:par>
+                      </p:childTnLst>
+                    </p:cTn>
+                  </p:par>
+                  <p:par>
+                    <p:cTn id="11" fill="hold">
+                      <p:stCondLst>
+                        <p:cond delay="indefinite"/>
+                      </p:stCondLst>
+                      <p:childTnLst>
+                        <p:par>
+                          <p:cTn id="12" fill="hold">
+                            <p:stCondLst>
+                              <p:cond delay="0"/>
+                            </p:stCondLst>
+                            <p:childTnLst>
+                              <p:par>
+                                <p:cTn id="13" presetID="1" presetClass="entr" presetSubtype="0" fill="hold" grpId="0" nodeType="clickEffect">
+                                  <p:stCondLst>
+                                    <p:cond delay="0"/>
+                                  </p:stCondLst>
+                                  <p:childTnLst>
+                                    <p:set>
+                                      <p:cBhvr>
+                                        <p:cTn id="14" dur="1" fill="hold">
+                                          <p:stCondLst>
+                                            <p:cond delay="0"/>
+                                          </p:stCondLst>
+                                        </p:cTn>
+                                        <p:tgtEl>
+                                          <p:spTgt spid="3">
+                                            <p:txEl>
+                                              <p:pRg st="2" end="2"/>
+                                            </p:txEl>
+                                          </p:spTgt>
+                                        </p:tgtEl>
+                                        <p:attrNameLst>
+                                          <p:attrName>style.visibility</p:attrName>
+                                        </p:attrNameLst>
+                                      </p:cBhvr>
+                                      <p:to>
+                                        <p:strVal val="visible"/>
+                                      </p:to>
+                                    </p:set>
+                                  </p:childTnLst>
+                                </p:cTn>
+                              </p:par>
+                            </p:childTnLst>
+                          </p:cTn>
+                        </p:par>
+                      </p:childTnLst>
+                    </p:cTn>
+                  </p:par>
+                </p:childTnLst>
+              </p:cTn>
+              <p:prevCondLst>
+                <p:cond evt="onPrev" delay="0">
+                  <p:tgtEl>
+                    <p:sldTgt/>
+                  </p:tgtEl>
+                </p:cond>
+              </p:prevCondLst>
+              <p:nextCondLst>
+                <p:cond evt="onNext" delay="0">
+                  <p:tgtEl>
+                    <p:sldTgt/>
+                  </p:tgtEl>
+                </p:cond>
+              </p:nextCondLst>
+            </p:seq>
+          </p:childTnLst>
+        </p:cTn>
+      </p:par>
+    </p:tnLst>
+    <p:bldLst>
+      <p:bldP spid="3" grpId="0" uiExpand="1" build="p"/>
+    </p:bldLst>
+  </p:timing>
 </p:sld>
 </file>
 
@@ -10700,7 +11452,7 @@
             <a:pPr lvl="0"/>
             <a:r>
               <a:rPr b="1"/>
-              <a:t>Methods</a:t>
+              <a:t>Types</a:t>
             </a:r>
             <a:r>
               <a:rPr/>
@@ -11059,7 +11811,7 @@
             </a:pPr>
             <a:r>
               <a:rPr/>
-              <a:t>Interpretation of Results</a:t>
+              <a:t>Advantages of Matching</a:t>
             </a:r>
           </a:p>
         </p:txBody>
@@ -11081,52 +11833,29 @@
           <a:p>
             <a:pPr lvl="0"/>
             <a:r>
-              <a:rPr b="1"/>
-              <a:t>Enrolled</a:t>
-            </a:r>
-            <a:r>
               <a:rPr/>
-              <a:t> coefficient: Baseline difference between groups</a:t>
+              <a:t>Reduces selection bias</a:t>
             </a:r>
           </a:p>
           <a:p>
             <a:pPr lvl="0"/>
             <a:r>
-              <a:rPr b="1"/>
-              <a:t>Round</a:t>
-            </a:r>
-            <a:r>
               <a:rPr/>
-              <a:t> coefficient: Time trend for all facilities</a:t>
+              <a:t>Makes treatment and control groups comparable</a:t>
             </a:r>
           </a:p>
           <a:p>
             <a:pPr lvl="0"/>
             <a:r>
-              <a:rPr b="1"/>
-              <a:t>Enrollment × Round</a:t>
-            </a:r>
-            <a:r>
               <a:rPr/>
-              <a:t>: The program’s causal effect</a:t>
+              <a:t>Can combine with difference-in-differences for robust estimation</a:t>
             </a:r>
           </a:p>
           <a:p>
-            <a:pPr lvl="0" indent="0" marL="1270000">
-              <a:buNone/>
-            </a:pPr>
-            <a:r>
-              <a:rPr sz="2000" b="1"/>
-              <a:t>Note</a:t>
-            </a:r>
-          </a:p>
-          <a:p>
-            <a:pPr lvl="0" indent="0" marL="1270000">
-              <a:buNone/>
-            </a:pPr>
-            <a:r>
-              <a:rPr sz="2000"/>
-              <a:t>The interaction coefficient (Enrollment × Round) represents our estimate of the causal impact of the program on waste management costs.</a:t>
+            <a:pPr lvl="0"/>
+            <a:r>
+              <a:rPr/>
+              <a:t>Works even without baseline randomization</a:t>
             </a:r>
           </a:p>
         </p:txBody>
@@ -11288,6 +12017,55 @@
                       </p:childTnLst>
                     </p:cTn>
                   </p:par>
+                  <p:par>
+                    <p:cTn id="15" fill="hold">
+                      <p:stCondLst>
+                        <p:cond delay="indefinite"/>
+                      </p:stCondLst>
+                      <p:childTnLst>
+                        <p:par>
+                          <p:cTn id="16" fill="hold">
+                            <p:stCondLst>
+                              <p:cond delay="0"/>
+                            </p:stCondLst>
+                            <p:childTnLst>
+                              <p:par>
+                                <p:cTn id="17" presetID="1" presetClass="entr" presetSubtype="0" fill="hold" grpId="0" nodeType="clickEffect">
+                                  <p:stCondLst>
+                                    <p:cond delay="0"/>
+                                  </p:stCondLst>
+                                  <p:childTnLst>
+                                    <p:set>
+                                      <p:cBhvr>
+                                        <p:cTn id="18" dur="1" fill="hold">
+                                          <p:stCondLst>
+                                            <p:cond delay="0"/>
+                                          </p:stCondLst>
+                                        </p:cTn>
+                                        <p:tgtEl>
+                                          <p:spTgt spid="3">
+                                            <p:txEl>
+                                              <p:pRg st="3" end="3"/>
+                                            </p:txEl>
+                                          </p:spTgt>
+                                        </p:tgtEl>
+                                        <p:attrNameLst>
+                                          <p:attrName>style.visibility</p:attrName>
+                                        </p:attrNameLst>
+                                      </p:cBhvr>
+                                      <p:to>
+                                        <p:strVal val="visible"/>
+                                      </p:to>
+                                    </p:set>
+                                  </p:childTnLst>
+                                </p:cTn>
+                              </p:par>
+                            </p:childTnLst>
+                          </p:cTn>
+                        </p:par>
+                      </p:childTnLst>
+                    </p:cTn>
+                  </p:par>
                 </p:childTnLst>
               </p:cTn>
               <p:prevCondLst>
@@ -11353,7 +12131,7 @@
             </a:pPr>
             <a:r>
               <a:rPr/>
-              <a:t>Advantages of Matching</a:t>
+              <a:t>Limitations of Matching</a:t>
             </a:r>
           </a:p>
         </p:txBody>
@@ -11376,28 +12154,36 @@
             <a:pPr lvl="0"/>
             <a:r>
               <a:rPr/>
-              <a:t>Reduces selection bias</a:t>
+              <a:t>Only controls for </a:t>
+            </a:r>
+            <a:r>
+              <a:rPr b="1"/>
+              <a:t>observed</a:t>
+            </a:r>
+            <a:r>
+              <a:rPr/>
+              <a:t> variables</a:t>
             </a:r>
           </a:p>
           <a:p>
             <a:pPr lvl="0"/>
             <a:r>
               <a:rPr/>
-              <a:t>Makes treatment and control groups comparable</a:t>
+              <a:t>Cannot account for unobserved confounders</a:t>
             </a:r>
           </a:p>
           <a:p>
             <a:pPr lvl="0"/>
             <a:r>
               <a:rPr/>
-              <a:t>Can combine with difference-in-differences for robust estimation</a:t>
+              <a:t>Requires good data on pre-treatment characteristics</a:t>
             </a:r>
           </a:p>
           <a:p>
             <a:pPr lvl="0"/>
             <a:r>
               <a:rPr/>
-              <a:t>Works even without baseline randomization</a:t>
+              <a:t>Common support may be limited in some contexts</a:t>
             </a:r>
           </a:p>
         </p:txBody>
@@ -11637,334 +12423,6 @@
 </file>
 
 <file path=ppt/slides/slide22.xml><?xml version="1.0" encoding="utf-8"?>
-<p:sld xmlns:a="http://schemas.openxmlformats.org/drawingml/2006/main" xmlns:r="http://schemas.openxmlformats.org/officeDocument/2006/relationships" xmlns:p="http://schemas.openxmlformats.org/presentationml/2006/main">
-  <p:cSld>
-    <p:spTree>
-      <p:nvGrpSpPr>
-        <p:cNvPr id="1" name=""/>
-        <p:cNvGrpSpPr/>
-        <p:nvPr/>
-      </p:nvGrpSpPr>
-      <p:grpSpPr>
-        <a:xfrm>
-          <a:off x="0" y="0"/>
-          <a:ext cx="0" cy="0"/>
-          <a:chOff x="0" y="0"/>
-          <a:chExt cx="0" cy="0"/>
-        </a:xfrm>
-      </p:grpSpPr>
-      <p:sp>
-        <p:nvSpPr>
-          <p:cNvPr id="2" name="Title 1"/>
-          <p:cNvSpPr>
-            <a:spLocks noGrp="1"/>
-          </p:cNvSpPr>
-          <p:nvPr>
-            <p:ph type="title"/>
-          </p:nvPr>
-        </p:nvSpPr>
-        <p:spPr/>
-        <p:txBody>
-          <a:bodyPr/>
-          <a:lstStyle/>
-          <a:p>
-            <a:pPr lvl="0" indent="0" marL="0">
-              <a:buNone/>
-            </a:pPr>
-            <a:r>
-              <a:rPr/>
-              <a:t>Limitations of Matching</a:t>
-            </a:r>
-          </a:p>
-        </p:txBody>
-      </p:sp>
-      <p:sp>
-        <p:nvSpPr>
-          <p:cNvPr id="3" name="Content Placeholder 2"/>
-          <p:cNvSpPr>
-            <a:spLocks noGrp="1"/>
-          </p:cNvSpPr>
-          <p:nvPr>
-            <p:ph idx="1"/>
-          </p:nvPr>
-        </p:nvSpPr>
-        <p:spPr/>
-        <p:txBody>
-          <a:bodyPr/>
-          <a:lstStyle/>
-          <a:p>
-            <a:pPr lvl="0"/>
-            <a:r>
-              <a:rPr/>
-              <a:t>Only controls for </a:t>
-            </a:r>
-            <a:r>
-              <a:rPr b="1"/>
-              <a:t>observed</a:t>
-            </a:r>
-            <a:r>
-              <a:rPr/>
-              <a:t> variables</a:t>
-            </a:r>
-          </a:p>
-          <a:p>
-            <a:pPr lvl="0"/>
-            <a:r>
-              <a:rPr/>
-              <a:t>Cannot account for unobserved confounders</a:t>
-            </a:r>
-          </a:p>
-          <a:p>
-            <a:pPr lvl="0"/>
-            <a:r>
-              <a:rPr/>
-              <a:t>Requires good data on pre-treatment characteristics</a:t>
-            </a:r>
-          </a:p>
-          <a:p>
-            <a:pPr lvl="0"/>
-            <a:r>
-              <a:rPr/>
-              <a:t>Common support may be limited in some contexts</a:t>
-            </a:r>
-          </a:p>
-        </p:txBody>
-      </p:sp>
-    </p:spTree>
-  </p:cSld>
-  <p:timing>
-    <p:tnLst>
-      <p:par>
-        <p:cTn id="1" dur="indefinite" restart="never" nodeType="tmRoot">
-          <p:childTnLst>
-            <p:seq concurrent="1" nextAc="seek">
-              <p:cTn id="2" dur="indefinite" nodeType="mainSeq">
-                <p:childTnLst>
-                  <p:par>
-                    <p:cTn id="3" fill="hold">
-                      <p:stCondLst>
-                        <p:cond delay="indefinite"/>
-                      </p:stCondLst>
-                      <p:childTnLst>
-                        <p:par>
-                          <p:cTn id="4" fill="hold">
-                            <p:stCondLst>
-                              <p:cond delay="0"/>
-                            </p:stCondLst>
-                            <p:childTnLst>
-                              <p:par>
-                                <p:cTn id="5" presetID="1" presetClass="entr" presetSubtype="0" fill="hold" grpId="0" nodeType="clickEffect">
-                                  <p:stCondLst>
-                                    <p:cond delay="0"/>
-                                  </p:stCondLst>
-                                  <p:childTnLst>
-                                    <p:set>
-                                      <p:cBhvr>
-                                        <p:cTn id="6" dur="1" fill="hold">
-                                          <p:stCondLst>
-                                            <p:cond delay="0"/>
-                                          </p:stCondLst>
-                                        </p:cTn>
-                                        <p:tgtEl>
-                                          <p:spTgt spid="3">
-                                            <p:txEl>
-                                              <p:pRg st="0" end="0"/>
-                                            </p:txEl>
-                                          </p:spTgt>
-                                        </p:tgtEl>
-                                        <p:attrNameLst>
-                                          <p:attrName>style.visibility</p:attrName>
-                                        </p:attrNameLst>
-                                      </p:cBhvr>
-                                      <p:to>
-                                        <p:strVal val="visible"/>
-                                      </p:to>
-                                    </p:set>
-                                  </p:childTnLst>
-                                </p:cTn>
-                              </p:par>
-                            </p:childTnLst>
-                          </p:cTn>
-                        </p:par>
-                      </p:childTnLst>
-                    </p:cTn>
-                  </p:par>
-                  <p:par>
-                    <p:cTn id="7" fill="hold">
-                      <p:stCondLst>
-                        <p:cond delay="indefinite"/>
-                      </p:stCondLst>
-                      <p:childTnLst>
-                        <p:par>
-                          <p:cTn id="8" fill="hold">
-                            <p:stCondLst>
-                              <p:cond delay="0"/>
-                            </p:stCondLst>
-                            <p:childTnLst>
-                              <p:par>
-                                <p:cTn id="9" presetID="1" presetClass="entr" presetSubtype="0" fill="hold" grpId="0" nodeType="clickEffect">
-                                  <p:stCondLst>
-                                    <p:cond delay="0"/>
-                                  </p:stCondLst>
-                                  <p:childTnLst>
-                                    <p:set>
-                                      <p:cBhvr>
-                                        <p:cTn id="10" dur="1" fill="hold">
-                                          <p:stCondLst>
-                                            <p:cond delay="0"/>
-                                          </p:stCondLst>
-                                        </p:cTn>
-                                        <p:tgtEl>
-                                          <p:spTgt spid="3">
-                                            <p:txEl>
-                                              <p:pRg st="1" end="1"/>
-                                            </p:txEl>
-                                          </p:spTgt>
-                                        </p:tgtEl>
-                                        <p:attrNameLst>
-                                          <p:attrName>style.visibility</p:attrName>
-                                        </p:attrNameLst>
-                                      </p:cBhvr>
-                                      <p:to>
-                                        <p:strVal val="visible"/>
-                                      </p:to>
-                                    </p:set>
-                                  </p:childTnLst>
-                                </p:cTn>
-                              </p:par>
-                            </p:childTnLst>
-                          </p:cTn>
-                        </p:par>
-                      </p:childTnLst>
-                    </p:cTn>
-                  </p:par>
-                  <p:par>
-                    <p:cTn id="11" fill="hold">
-                      <p:stCondLst>
-                        <p:cond delay="indefinite"/>
-                      </p:stCondLst>
-                      <p:childTnLst>
-                        <p:par>
-                          <p:cTn id="12" fill="hold">
-                            <p:stCondLst>
-                              <p:cond delay="0"/>
-                            </p:stCondLst>
-                            <p:childTnLst>
-                              <p:par>
-                                <p:cTn id="13" presetID="1" presetClass="entr" presetSubtype="0" fill="hold" grpId="0" nodeType="clickEffect">
-                                  <p:stCondLst>
-                                    <p:cond delay="0"/>
-                                  </p:stCondLst>
-                                  <p:childTnLst>
-                                    <p:set>
-                                      <p:cBhvr>
-                                        <p:cTn id="14" dur="1" fill="hold">
-                                          <p:stCondLst>
-                                            <p:cond delay="0"/>
-                                          </p:stCondLst>
-                                        </p:cTn>
-                                        <p:tgtEl>
-                                          <p:spTgt spid="3">
-                                            <p:txEl>
-                                              <p:pRg st="2" end="2"/>
-                                            </p:txEl>
-                                          </p:spTgt>
-                                        </p:tgtEl>
-                                        <p:attrNameLst>
-                                          <p:attrName>style.visibility</p:attrName>
-                                        </p:attrNameLst>
-                                      </p:cBhvr>
-                                      <p:to>
-                                        <p:strVal val="visible"/>
-                                      </p:to>
-                                    </p:set>
-                                  </p:childTnLst>
-                                </p:cTn>
-                              </p:par>
-                            </p:childTnLst>
-                          </p:cTn>
-                        </p:par>
-                      </p:childTnLst>
-                    </p:cTn>
-                  </p:par>
-                  <p:par>
-                    <p:cTn id="15" fill="hold">
-                      <p:stCondLst>
-                        <p:cond delay="indefinite"/>
-                      </p:stCondLst>
-                      <p:childTnLst>
-                        <p:par>
-                          <p:cTn id="16" fill="hold">
-                            <p:stCondLst>
-                              <p:cond delay="0"/>
-                            </p:stCondLst>
-                            <p:childTnLst>
-                              <p:par>
-                                <p:cTn id="17" presetID="1" presetClass="entr" presetSubtype="0" fill="hold" grpId="0" nodeType="clickEffect">
-                                  <p:stCondLst>
-                                    <p:cond delay="0"/>
-                                  </p:stCondLst>
-                                  <p:childTnLst>
-                                    <p:set>
-                                      <p:cBhvr>
-                                        <p:cTn id="18" dur="1" fill="hold">
-                                          <p:stCondLst>
-                                            <p:cond delay="0"/>
-                                          </p:stCondLst>
-                                        </p:cTn>
-                                        <p:tgtEl>
-                                          <p:spTgt spid="3">
-                                            <p:txEl>
-                                              <p:pRg st="3" end="3"/>
-                                            </p:txEl>
-                                          </p:spTgt>
-                                        </p:tgtEl>
-                                        <p:attrNameLst>
-                                          <p:attrName>style.visibility</p:attrName>
-                                        </p:attrNameLst>
-                                      </p:cBhvr>
-                                      <p:to>
-                                        <p:strVal val="visible"/>
-                                      </p:to>
-                                    </p:set>
-                                  </p:childTnLst>
-                                </p:cTn>
-                              </p:par>
-                            </p:childTnLst>
-                          </p:cTn>
-                        </p:par>
-                      </p:childTnLst>
-                    </p:cTn>
-                  </p:par>
-                </p:childTnLst>
-              </p:cTn>
-              <p:prevCondLst>
-                <p:cond evt="onPrev" delay="0">
-                  <p:tgtEl>
-                    <p:sldTgt/>
-                  </p:tgtEl>
-                </p:cond>
-              </p:prevCondLst>
-              <p:nextCondLst>
-                <p:cond evt="onNext" delay="0">
-                  <p:tgtEl>
-                    <p:sldTgt/>
-                  </p:tgtEl>
-                </p:cond>
-              </p:nextCondLst>
-            </p:seq>
-          </p:childTnLst>
-        </p:cTn>
-      </p:par>
-    </p:tnLst>
-    <p:bldLst>
-      <p:bldP spid="3" grpId="0" uiExpand="1" build="p"/>
-    </p:bldLst>
-  </p:timing>
-</p:sld>
-</file>
-
-<file path=ppt/slides/slide23.xml><?xml version="1.0" encoding="utf-8"?>
 <p:sld xmlns:a="http://schemas.openxmlformats.org/drawingml/2006/main" xmlns:r="http://schemas.openxmlformats.org/officeDocument/2006/relationships" xmlns:p="http://schemas.openxmlformats.org/presentationml/2006/main">
   <p:cSld>
     <p:spTree>
@@ -12394,7 +12852,7 @@
 </p:sld>
 </file>
 
-<file path=ppt/slides/slide24.xml><?xml version="1.0" encoding="utf-8"?>
+<file path=ppt/slides/slide23.xml><?xml version="1.0" encoding="utf-8"?>
 <p:sld xmlns:a="http://schemas.openxmlformats.org/drawingml/2006/main" xmlns:r="http://schemas.openxmlformats.org/officeDocument/2006/relationships" xmlns:p="http://schemas.openxmlformats.org/presentationml/2006/main">
   <p:cSld>
     <p:spTree>
@@ -12740,7 +13198,7 @@
 </p:sld>
 </file>
 
-<file path=ppt/slides/slide25.xml><?xml version="1.0" encoding="utf-8"?>
+<file path=ppt/slides/slide24.xml><?xml version="1.0" encoding="utf-8"?>
 <p:sld xmlns:a="http://schemas.openxmlformats.org/drawingml/2006/main" xmlns:r="http://schemas.openxmlformats.org/officeDocument/2006/relationships" xmlns:p="http://schemas.openxmlformats.org/presentationml/2006/main">
   <p:cSld>
     <p:spTree>
@@ -13713,12 +14171,12 @@
               <a:t># A tibble: 6 × 4
   facility_identifier enrolled waste_management_costs_0 waste_management_costs_1
                 &lt;int&gt;    &lt;int&gt;                    &lt;dbl&gt;                    &lt;dbl&gt;
-1                   5        1                   15185.                   19581.
-2                  11        1                   13076.                    2399.
-3                  13        1                   15286.                       0 
-4                  16        1                   11312.                   20027.
-5                  21        1                   11224.                   16665.
-6                  22        1                    8877.                     116.</a:t>
+1                   5        1                    1519.                   1958. 
+2                  11        1                    1308.                    240. 
+3                  13        1                    1529.                      0  
+4                  16        1                    1131.                   2003. 
+5                  21        1                    1122.                   1666. 
+6                  22        1                     888.                     11.6</a:t>
             </a:r>
           </a:p>
         </p:txBody>
@@ -13765,7 +14223,7 @@
             </a:pPr>
             <a:r>
               <a:rPr/>
-              <a:t>Propensity Score Matching</a:t>
+              <a:t>Propensity Score Matching (PSM)</a:t>
             </a:r>
           </a:p>
         </p:txBody>
@@ -13790,7 +14248,7 @@
             </a:pPr>
             <a:r>
               <a:rPr/>
-              <a:t>Two scenarios for predicting enrollment:</a:t>
+              <a:t>Propensity Score Matching (PSM) is when we predict the probability of each unit receiving treatment and then compare those with similar propensity scores. There are two scenarios for predicting enrollment:</a:t>
             </a:r>
           </a:p>
           <a:p>
@@ -15695,9 +16153,9 @@
                 <a:tableStyleId>{5C22544A-7EE6-4342-B048-85BDC9FD1C3A}</a:tableStyleId>
               </a:tblPr>
               <a:tblGrid>
-                <a:gridCol w="1701800"/>
-                <a:gridCol w="1701800"/>
-                <a:gridCol w="1701800"/>
+                <a:gridCol w="2997200"/>
+                <a:gridCol w="1130300"/>
+                <a:gridCol w="977900"/>
               </a:tblGrid>
               <a:tr h="0">
                 <a:tc>
@@ -16141,7 +16599,7 @@
                       </a:pPr>
                       <a:r>
                         <a:rPr/>
-                        <a:t>(0.051)</a:t>
+                        <a:t>(0.052)</a:t>
                       </a:r>
                     </a:p>
                   </a:txBody>
@@ -16661,6 +17119,147 @@
                       </a:pPr>
                       <a:r>
                         <a:rPr/>
+                        <a:t>AIC</a:t>
+                      </a:r>
+                    </a:p>
+                  </a:txBody>
+                </a:tc>
+                <a:tc>
+                  <a:txBody>
+                    <a:bodyPr/>
+                    <a:lstStyle/>
+                    <a:p>
+                      <a:pPr lvl="0" indent="0" marL="0">
+                        <a:buNone/>
+                      </a:pPr>
+                      <a:r>
+                        <a:rPr/>
+                        <a:t>11658.4</a:t>
+                      </a:r>
+                    </a:p>
+                  </a:txBody>
+                </a:tc>
+                <a:tc>
+                  <a:txBody>
+                    <a:bodyPr/>
+                    <a:lstStyle/>
+                    <a:p>
+                      <a:pPr lvl="0" indent="0" marL="0">
+                        <a:buNone/>
+                      </a:pPr>
+                      <a:r>
+                        <a:rPr/>
+                        <a:t>11037.0</a:t>
+                      </a:r>
+                    </a:p>
+                  </a:txBody>
+                </a:tc>
+              </a:tr>
+              <a:tr h="0">
+                <a:tc>
+                  <a:txBody>
+                    <a:bodyPr/>
+                    <a:lstStyle/>
+                    <a:p>
+                      <a:pPr lvl="0" indent="0" marL="0">
+                        <a:buNone/>
+                      </a:pPr>
+                      <a:r>
+                        <a:rPr/>
+                        <a:t>BIC</a:t>
+                      </a:r>
+                    </a:p>
+                  </a:txBody>
+                </a:tc>
+                <a:tc>
+                  <a:txBody>
+                    <a:bodyPr/>
+                    <a:lstStyle/>
+                    <a:p>
+                      <a:pPr lvl="0" indent="0" marL="0">
+                        <a:buNone/>
+                      </a:pPr>
+                      <a:r>
+                        <a:rPr/>
+                        <a:t>11680.0</a:t>
+                      </a:r>
+                    </a:p>
+                  </a:txBody>
+                </a:tc>
+                <a:tc>
+                  <a:txBody>
+                    <a:bodyPr/>
+                    <a:lstStyle/>
+                    <a:p>
+                      <a:pPr lvl="0" indent="0" marL="0">
+                        <a:buNone/>
+                      </a:pPr>
+                      <a:r>
+                        <a:rPr/>
+                        <a:t>11123.5</a:t>
+                      </a:r>
+                    </a:p>
+                  </a:txBody>
+                </a:tc>
+              </a:tr>
+              <a:tr h="0">
+                <a:tc>
+                  <a:txBody>
+                    <a:bodyPr/>
+                    <a:lstStyle/>
+                    <a:p>
+                      <a:pPr lvl="0" indent="0" marL="0">
+                        <a:buNone/>
+                      </a:pPr>
+                      <a:r>
+                        <a:rPr/>
+                        <a:t>Log.Lik.</a:t>
+                      </a:r>
+                    </a:p>
+                  </a:txBody>
+                </a:tc>
+                <a:tc>
+                  <a:txBody>
+                    <a:bodyPr/>
+                    <a:lstStyle/>
+                    <a:p>
+                      <a:pPr lvl="0" indent="0" marL="0">
+                        <a:buNone/>
+                      </a:pPr>
+                      <a:r>
+                        <a:rPr/>
+                        <a:t>-5826.175</a:t>
+                      </a:r>
+                    </a:p>
+                  </a:txBody>
+                </a:tc>
+                <a:tc>
+                  <a:txBody>
+                    <a:bodyPr/>
+                    <a:lstStyle/>
+                    <a:p>
+                      <a:pPr lvl="0" indent="0" marL="0">
+                        <a:buNone/>
+                      </a:pPr>
+                      <a:r>
+                        <a:rPr/>
+                        <a:t>-5506.520</a:t>
+                      </a:r>
+                    </a:p>
+                  </a:txBody>
+                </a:tc>
+              </a:tr>
+              <a:tr h="0">
+                <a:tc>
+                  <a:txBody>
+                    <a:bodyPr/>
+                    <a:lstStyle/>
+                    <a:p>
+                      <a:pPr lvl="0" indent="0" marL="0">
+                        <a:buNone/>
+                      </a:pPr>
+                      <a:r>
+                        <a:rPr/>
                         <a:t>F</a:t>
                       </a:r>
                     </a:p>
@@ -16676,7 +17275,7 @@
                       </a:pPr>
                       <a:r>
                         <a:rPr/>
-                        <a:t>211.015</a:t>
+                        <a:t>211.091</a:t>
                       </a:r>
                     </a:p>
                   </a:txBody>
@@ -16691,7 +17290,7 @@
                       </a:pPr>
                       <a:r>
                         <a:rPr/>
-                        <a:t>89.077</a:t>
+                        <a:t>87.937</a:t>
                       </a:r>
                     </a:p>
                   </a:txBody>
